--- a/examples/slides/output/results_examples.pptx
+++ b/examples/slides/output/results_examples.pptx
@@ -514,12 +514,35 @@
           <a:p>
             <a:r>
               <a:rPr lang="en-US" dirty="0"/>
-              <a:t>PATTERN: assertion–evidence. Use it for the main result of a section: one figure, one sentence.
-Design rules shown: the title names the topic, not the finding; the figure is drawn at its on-slide size (12.1 x 4.6 in, 200 dpi) and placed 1:1, never scaled; the single bold conclusion at the bottom carries the effect size with interval, p, n and events; the source line sits bottom right in 9 pt serif.
-Numbers: km_example run_meta (hormone_therapy: HR 0.695 [0.544–0.888], Cox p 0.0036, log-rank p 0.0034; log_pnodes: HR per SD 1.650 [1.479–1.841], Cox p 3.5e-19). HR for tamoxifen is yes vs no; nodes per SD of log(1 + nodes).
-Wording: observational association, so 'associated with', not 'improves'.</a:t>
-            </a:r>
+              <a:t>PATTERN: assertion–evidence. Use it for the main result of a section: one figure, one sentence.</a:t>
+            </a:r>
+          </a:p>
+          <a:p>
             <a:endParaRPr lang="en-US" dirty="0"/>
+          </a:p>
+          <a:p>
+            <a:r>
+              <a:rPr lang="en-US" dirty="0"/>
+              <a:t>Design rules shown: the title names the topic, not the finding; the figure is drawn at its on-slide size (12.1 x 4.6 in, 200 dpi) and placed 1:1, never scaled; the single bold conclusion at the bottom carries the effect size with interval, p, n and events; the source line sits bottom right in 9 pt serif.</a:t>
+            </a:r>
+          </a:p>
+          <a:p>
+            <a:endParaRPr lang="en-US" dirty="0"/>
+          </a:p>
+          <a:p>
+            <a:r>
+              <a:rPr lang="en-US" dirty="0"/>
+              <a:t>Numbers: km_example run_meta (hormone_therapy: HR 0.695 [0.544–0.888], Cox p 0.0036, log-rank p 0.0034; log_pnodes: HR per SD 1.650 [1.479–1.841], Cox p 3.5e-19). HR for tamoxifen is yes vs no; nodes per SD of log(1 + nodes).</a:t>
+            </a:r>
+          </a:p>
+          <a:p>
+            <a:endParaRPr lang="en-US" dirty="0"/>
+          </a:p>
+          <a:p>
+            <a:r>
+              <a:rPr lang="en-US" dirty="0"/>
+              <a:t>Wording: observational association, so 'associated with', not 'improves'.</a:t>
+            </a:r>
           </a:p>
         </p:txBody>
       </p:sp>
@@ -605,11 +628,26 @@
           <a:p>
             <a:r>
               <a:rPr lang="en-US" dirty="0"/>
-              <a:t>PATTERN: feature-definition table. Use it before the first result that uses engineered or transformed features, so 'HR 1.65 per SD' can be read without the methods section.
-Design rules shown: three-line table; first column left (bold feature names), all other columns centred; the 'Low → high' column gives the observed range (text here; a pair of small icons can replace it when suitable ones exist); the last column turns the sign of the HR into plain words.
-Numbers: min, max and SD recomputed from load_gbsg2 (SD of log1p values for nodes and PR). The 'HR &gt; 1 means' column defines how to read the sign; the observed direction for PR is HR &lt; 1 (forest plot).</a:t>
-            </a:r>
+              <a:t>PATTERN: feature-definition table. Use it before the first result that uses engineered or transformed features, so 'HR 1.65 per SD' can be read without the methods section.</a:t>
+            </a:r>
+          </a:p>
+          <a:p>
             <a:endParaRPr lang="en-US" dirty="0"/>
+          </a:p>
+          <a:p>
+            <a:r>
+              <a:rPr lang="en-US" dirty="0"/>
+              <a:t>Design rules shown: three-line table; first column left (bold feature names), all other columns centered; the 'Low → high' column gives the observed range (text here; a pair of small icons can replace it when suitable ones exist); the last column turns the sign of the HR into plain words.</a:t>
+            </a:r>
+          </a:p>
+          <a:p>
+            <a:endParaRPr lang="en-US" dirty="0"/>
+          </a:p>
+          <a:p>
+            <a:r>
+              <a:rPr lang="en-US" dirty="0"/>
+              <a:t>Numbers: min, max and SD recomputed from load_gbsg2 (SD of log1p values for nodes and PR). The 'HR &gt; 1 means' column defines how to read the sign; the observed direction for PR is HR &lt; 1 (forest plot).</a:t>
+            </a:r>
           </a:p>
         </p:txBody>
       </p:sp>
@@ -695,12 +733,35 @@
           <a:p>
             <a:r>
               <a:rPr lang="en-US" dirty="0"/>
-              <a:t>PATTERN: model comparison table. Use it to compare nested models on one metric; order rows from simplest to fullest so the gain per added block reads top to bottom.
-Design rules shown: three-line table, numbers to three decimals in every column; the apparent C-index is labelled as apparent (same patients), next to a cross-validated value; the conclusion says 'same patients'.
-Numbers: recomputed from load_gbsg2. Continuous variables standardised (per SD); nodes, PR and ER as log(1 + x). Apparent C-index = lifelines concordance_index_ of the fitted model. CV: sklearn KFold(5, shuffle=True, random_state=0), standardisation from the training fold, Harrell's C on the test fold, mean over folds (fold SD 0.052, 0.061, 0.043).
-Over-reading: there is no external validation set; the gain of 0.04–0.05 is within the fold-to-fold spread.</a:t>
-            </a:r>
+              <a:t>PATTERN: model comparison table. Use it to compare nested models on one metric; order rows from simplest to fullest so the gain per added block reads top to bottom.</a:t>
+            </a:r>
+          </a:p>
+          <a:p>
             <a:endParaRPr lang="en-US" dirty="0"/>
+          </a:p>
+          <a:p>
+            <a:r>
+              <a:rPr lang="en-US" dirty="0"/>
+              <a:t>Design rules shown: three-line table, numbers to three decimals in every column; the apparent C-index is labeled as apparent (same patients), next to a cross-validated value; the conclusion says 'same patients'.</a:t>
+            </a:r>
+          </a:p>
+          <a:p>
+            <a:endParaRPr lang="en-US" dirty="0"/>
+          </a:p>
+          <a:p>
+            <a:r>
+              <a:rPr lang="en-US" dirty="0"/>
+              <a:t>Numbers: recomputed from load_gbsg2. Continuous variables standardized (per SD); nodes, PR and ER as log(1 + x). Apparent C-index = lifelines concordance_index_ of the fitted model. CV: sklearn KFold(5, shuffle=True, random_state=0), standardization from the training fold, Harrell's C on the test fold, mean over folds (fold SD 0.052, 0.061, 0.043).</a:t>
+            </a:r>
+          </a:p>
+          <a:p>
+            <a:endParaRPr lang="en-US" dirty="0"/>
+          </a:p>
+          <a:p>
+            <a:r>
+              <a:rPr lang="en-US" dirty="0"/>
+              <a:t>Over-reading: there is no external validation set; the gain of 0.04–0.05 is within the fold-to-fold spread.</a:t>
+            </a:r>
           </a:p>
         </p:txBody>
       </p:sp>
@@ -786,11 +847,26 @@
           <a:p>
             <a:r>
               <a:rPr lang="en-US" dirty="0"/>
-              <a:t>PATTERN: draft. Use the grey 'DRAFT – to be confirmed' tag on any slide whose numbers are not yet final, so nobody copies them into a report; remove the tag only after the checks below are done.
-⚠️ CAVEAT (to confirm before removing the DRAFT tag): proportional hazards not yet checked for the adjusted model; the adjustment set was chosen for this example, not prespecified; hormone therapy was not randomised for every patient in GBSG2, so residual confounding remains.
-Numbers: univariate HR from km_example run_meta; adjusted HR recomputed from load_gbsg2 (lifelines CoxPHFitter, 8 covariates, HR 0.681 [0.529–0.877], p 0.0029).</a:t>
-            </a:r>
+              <a:t>PATTERN: draft. Use the gray 'DRAFT – to be confirmed' tag on any slide whose numbers are not yet final, so nobody copies them into a report; remove the tag only after the checks below are done.</a:t>
+            </a:r>
+          </a:p>
+          <a:p>
             <a:endParaRPr lang="en-US" dirty="0"/>
+          </a:p>
+          <a:p>
+            <a:r>
+              <a:rPr lang="en-US" dirty="0"/>
+              <a:t>⚠️ CAVEAT (to confirm before removing the DRAFT tag): proportional hazards not yet checked for the adjusted model; the adjustment set was chosen for this example, not prespecified; hormone therapy was not randomized for every patient in GBSG2, so residual confounding remains.</a:t>
+            </a:r>
+          </a:p>
+          <a:p>
+            <a:endParaRPr lang="en-US" dirty="0"/>
+          </a:p>
+          <a:p>
+            <a:r>
+              <a:rPr lang="en-US" dirty="0"/>
+              <a:t>Numbers: univariate HR from km_example run_meta; adjusted HR recomputed from load_gbsg2 (lifelines CoxPHFitter, 8 covariates, HR 0.681 [0.529–0.877], p 0.0029).</a:t>
+            </a:r>
           </a:p>
         </p:txBody>
       </p:sp>
@@ -876,12 +952,35 @@
           <a:p>
             <a:r>
               <a:rPr lang="en-US" dirty="0"/>
-              <a:t>PATTERN: supplementary slide, hidden in the slide show. Use it for the dense supplementary table you expect a question about; it stays in the file and can be jumped to, but is skipped when presenting.
-Design rules shown: still one topic title, one conclusion and a source; the table may be denser (13 pt, 9 rows) because it is read on demand, not presented. Hidden with pptxgenjs slide.hidden = true (show="0").
-Numbers: univariate from forest_example run_meta; multivariable recomputed from load_gbsg2 (same 8 covariates, continuous per SD). q only for the univariate screen (8 tests).
-Over-reading: ER loses its association once PR is in the model (the two receptors are correlated); this is not evidence that ER is irrelevant.</a:t>
-            </a:r>
+              <a:t>PATTERN: supplementary slide, hidden in the slide show. Use it for the dense supplementary table you expect a question about; it stays in the file and can be jumped to, but is skipped when presenting.</a:t>
+            </a:r>
+          </a:p>
+          <a:p>
             <a:endParaRPr lang="en-US" dirty="0"/>
+          </a:p>
+          <a:p>
+            <a:r>
+              <a:rPr lang="en-US" dirty="0"/>
+              <a:t>Design rules shown: still one topic title, one conclusion and a source; the table may be denser (13 pt, 9 rows) because it is read on demand, not presented. Hidden with pptxgenjs slide.hidden = true (show="0").</a:t>
+            </a:r>
+          </a:p>
+          <a:p>
+            <a:endParaRPr lang="en-US" dirty="0"/>
+          </a:p>
+          <a:p>
+            <a:r>
+              <a:rPr lang="en-US" dirty="0"/>
+              <a:t>Numbers: univariate from forest_example run_meta; multivariable recomputed from load_gbsg2 (same 8 covariates, continuous per SD). q only for the univariate screen (8 tests).</a:t>
+            </a:r>
+          </a:p>
+          <a:p>
+            <a:endParaRPr lang="en-US" dirty="0"/>
+          </a:p>
+          <a:p>
+            <a:r>
+              <a:rPr lang="en-US" dirty="0"/>
+              <a:t>Over-reading: ER loses its association once PR is in the model (the two receptors are correlated); this is not evidence that ER is irrelevant.</a:t>
+            </a:r>
           </a:p>
         </p:txBody>
       </p:sp>
@@ -967,13 +1066,44 @@
           <a:p>
             <a:r>
               <a:rPr lang="en-US" dirty="0"/>
-              <a:t>PATTERN: two panels side by side with one shared conclusion. Use it when two analyses answer the same question (here: how well does one variable discriminate) and the comparison is the point.
-Design rules shown: both ROC panels are square and the same size, drawn in ONE native full-width figure (12.1 x 4.6 in); each panel states AUC [95% CI], n and positives; the diagonal marks chance.
-Why not two separate figures: roc_example.png is already full width (12.1 in) and auc_bars_example.png is half width (5.9 in), so together they would need 18 in. Result figures are never scaled, so the pair would not fit; the two-panel ROC figure is used instead (the AUC bars appear on the figure + takeaways slide).
-Numbers: roc_example run_meta. ER-positive = oestrogen receptor &gt;= 10 fmol/mg (n = 686, 497 positive). 5-year panel: recurrence or death before 5 years (285) vs followed &gt;= 5 years event-free; patients censored before 5 years are excluded (n = 406). Bootstrap: 2,000 resamples, percentile CI, random_state 0.
-Caution: PR and ER are correlated receptor assays, so AUC 0.877 shows co-expression, not a clinical test.</a:t>
-            </a:r>
+              <a:t>PATTERN: two panels side by side with one shared conclusion. Use it when two analyses answer the same question (here: how well does one variable discriminate) and the comparison is the point.</a:t>
+            </a:r>
+          </a:p>
+          <a:p>
             <a:endParaRPr lang="en-US" dirty="0"/>
+          </a:p>
+          <a:p>
+            <a:r>
+              <a:rPr lang="en-US" dirty="0"/>
+              <a:t>Design rules shown: both ROC panels are square and the same size, drawn in ONE native full-width figure (12.1 x 4.6 in); each panel states AUC [95% CI], n and positives; the diagonal marks chance.</a:t>
+            </a:r>
+          </a:p>
+          <a:p>
+            <a:endParaRPr lang="en-US" dirty="0"/>
+          </a:p>
+          <a:p>
+            <a:r>
+              <a:rPr lang="en-US" dirty="0"/>
+              <a:t>Why not two separate figures: roc_example.png is already full width (12.1 in) and auc_bars_example.png is half width (5.9 in), so together they would need 18 in. Result figures are never scaled, so the pair would not fit; the two-panel ROC figure is used instead (the AUC bars appear on the figure + takeaways slide).</a:t>
+            </a:r>
+          </a:p>
+          <a:p>
+            <a:endParaRPr lang="en-US" dirty="0"/>
+          </a:p>
+          <a:p>
+            <a:r>
+              <a:rPr lang="en-US" dirty="0"/>
+              <a:t>Numbers: roc_example run_meta. ER-positive = estrogen receptor &gt;= 10 fmol/mg (n = 686, 497 positive). 5-year panel: recurrence or death before 5 years (285) vs followed &gt;= 5 years event-free; patients censored before 5 years are excluded (n = 406). Bootstrap: 2,000 resamples, percentile CI, random_state 0.</a:t>
+            </a:r>
+          </a:p>
+          <a:p>
+            <a:endParaRPr lang="en-US" dirty="0"/>
+          </a:p>
+          <a:p>
+            <a:r>
+              <a:rPr lang="en-US" dirty="0"/>
+              <a:t>Caution: PR and ER are correlated receptor assays, so AUC 0.877 shows co-expression, not a clinical test.</a:t>
+            </a:r>
           </a:p>
         </p:txBody>
       </p:sp>
@@ -1059,12 +1189,35 @@
           <a:p>
             <a:r>
               <a:rPr lang="en-US" dirty="0"/>
-              <a:t>PATTERN: forest plot, full width. Use it for many effect sizes on one scale (one row per factor).
-Design rules shown: log x axis with a reference line at 1; the number column on the right is a three-line table with centred columns; only rows with q &lt; 0.05 are drawn in the accent colour, the rest grey; HR is per SD for continuous and yes vs no for binary factors, fixed once for the whole deck.
-Numbers: forest_example run_meta (8 univariate Cox models, Benjamini–Hochberg q over the 8). Strongest: positive nodes, log(1 + nodes) per SD, HR 1.650 [1.479–1.841], p 3.5e-19.
-'Strongest' means largest |log HR| per SD in univariate models; it is not adjusted for the other factors.</a:t>
-            </a:r>
+              <a:t>PATTERN: forest plot, full width. Use it for many effect sizes on one scale (one row per factor).</a:t>
+            </a:r>
+          </a:p>
+          <a:p>
             <a:endParaRPr lang="en-US" dirty="0"/>
+          </a:p>
+          <a:p>
+            <a:r>
+              <a:rPr lang="en-US" dirty="0"/>
+              <a:t>Design rules shown: log x axis with a reference line at 1; the number column on the right is a three-line table with centered columns; only rows with q &lt; 0.05 are drawn in the accent color, the rest gray; HR is per SD for continuous and yes vs no for binary factors, fixed once for the whole deck.</a:t>
+            </a:r>
+          </a:p>
+          <a:p>
+            <a:endParaRPr lang="en-US" dirty="0"/>
+          </a:p>
+          <a:p>
+            <a:r>
+              <a:rPr lang="en-US" dirty="0"/>
+              <a:t>Numbers: forest_example run_meta (8 univariate Cox models, Benjamini–Hochberg q over the 8). Strongest: positive nodes, log(1 + nodes) per SD, HR 1.650 [1.479–1.841], p 3.5e-19.</a:t>
+            </a:r>
+          </a:p>
+          <a:p>
+            <a:endParaRPr lang="en-US" dirty="0"/>
+          </a:p>
+          <a:p>
+            <a:r>
+              <a:rPr lang="en-US" dirty="0"/>
+              <a:t>'Strongest' means largest |log HR| per SD in univariate models; it is not adjusted for the other factors.</a:t>
+            </a:r>
           </a:p>
         </p:txBody>
       </p:sp>
@@ -1150,12 +1303,35 @@
           <a:p>
             <a:r>
               <a:rPr lang="en-US" dirty="0"/>
-              <a:t>PATTERN: native three-line table. Use it for a cohort table or any small grid of numbers the audience reads cell by cell; native tables stay editable and sharp, unlike a table pasted as an image.
-Design rules shown: three rules only (thick top, thin under header, thick bottom), no vertical lines, no fill; first column left-aligned, all other columns centred (header and values share a centre); header bold, same size as the body; n per group in the header; ranges with an en dash.
-Numbers: recomputed from lifelines load_gbsg2 (same code as fig_table in make_example_figures.py).
-Over-reading: the age and menopause imbalance means the univariate tamoxifen HR may be confounded; see the multivariable supplementary slide.</a:t>
-            </a:r>
+              <a:t>PATTERN: native three-line table. Use it for a cohort table or any small grid of numbers the audience reads cell by cell; native tables stay editable and sharp, unlike a table pasted as an image.</a:t>
+            </a:r>
+          </a:p>
+          <a:p>
             <a:endParaRPr lang="en-US" dirty="0"/>
+          </a:p>
+          <a:p>
+            <a:r>
+              <a:rPr lang="en-US" dirty="0"/>
+              <a:t>Design rules shown: three rules only (thick top, thin under header, thick bottom), no vertical lines, no fill; first column left-aligned, all other columns centered (header and values share a center); header bold, same size as the body; n per group in the header; ranges with an en dash.</a:t>
+            </a:r>
+          </a:p>
+          <a:p>
+            <a:endParaRPr lang="en-US" dirty="0"/>
+          </a:p>
+          <a:p>
+            <a:r>
+              <a:rPr lang="en-US" dirty="0"/>
+              <a:t>Numbers: recomputed from lifelines load_gbsg2 (same code as fig_table in examples/plotting/tables.py).</a:t>
+            </a:r>
+          </a:p>
+          <a:p>
+            <a:endParaRPr lang="en-US" dirty="0"/>
+          </a:p>
+          <a:p>
+            <a:r>
+              <a:rPr lang="en-US" dirty="0"/>
+              <a:t>Over-reading: the age and menopause imbalance means the univariate tamoxifen HR may be confounded; see the multivariable supplementary slide.</a:t>
+            </a:r>
           </a:p>
         </p:txBody>
       </p:sp>
@@ -1241,11 +1417,26 @@
           <a:p>
             <a:r>
               <a:rPr lang="en-US" dirty="0"/>
-              <a:t>PATTERN: key numbers ('big number'). Use it sparingly: opening a results section, or the one slide people should remember. Three numbers at most; each needs a one-line label and its context (interval, denominator).
-Design rules shown: large numerals in the single accent colour, labels in grey, no decoration; conclusion and source still present, so the big number is never shown without its n and interval.
-Numbers: n and events from load_gbsg2; 44% = 299/686; median observed time (not reverse Kaplan–Meier follow-up) 3.0 years; HR from km_example run_meta (0.695 [0.544–0.888], p 0.0036).</a:t>
-            </a:r>
+              <a:t>PATTERN: key numbers ('big number'). Use it sparingly: opening a results section, or the one slide people should remember. Three numbers at most; each needs a one-line label and its context (interval, denominator).</a:t>
+            </a:r>
+          </a:p>
+          <a:p>
             <a:endParaRPr lang="en-US" dirty="0"/>
+          </a:p>
+          <a:p>
+            <a:r>
+              <a:rPr lang="en-US" dirty="0"/>
+              <a:t>Design rules shown: large numerals in the single accent color, labels in gray, no decoration; conclusion and source still present, so the big number is never shown without its n and interval.</a:t>
+            </a:r>
+          </a:p>
+          <a:p>
+            <a:endParaRPr lang="en-US" dirty="0"/>
+          </a:p>
+          <a:p>
+            <a:r>
+              <a:rPr lang="en-US" dirty="0"/>
+              <a:t>Numbers: n and events from load_gbsg2; 44% = 299/686; median observed time (not reverse Kaplan–Meier follow-up) 3.0 years; HR from km_example run_meta (0.695 [0.544–0.888], p 0.0036).</a:t>
+            </a:r>
           </a:p>
         </p:txBody>
       </p:sp>
@@ -1331,12 +1522,35 @@
           <a:p>
             <a:r>
               <a:rPr lang="en-US" dirty="0"/>
-              <a:t>PATTERN: figure + takeaways split. Use it when a half-width figure needs two or three reading hints that do not fit into one sentence. The takeaways guide the eye; the conclusion still states the one finding.
-Design rules shown: the figure is drawn half width (5.9 x 4.6 in) and placed 1:1 on the left; at most three short grey bullets at 18 pt on the right; bars start at chance (0.5); accent = CI excludes 0.5.
-Numbers: auc_bars_example run_meta (n = 686, 497 ER-positive, 2,000 bootstrap resamples, random_state 0). Grade I–II [0.618–0.694], age [0.519–0.618], nodes [0.498–0.602], tumour size [0.458–0.554].
-Over-reading: the direction of the flipped predictors (grade, nodes, size) was read off the same data, so AUCs near 0.5 are descriptive only.</a:t>
-            </a:r>
+              <a:t>PATTERN: figure + takeaways split. Use it when a half-width figure needs two or three reading hints that do not fit into one sentence. The takeaways guide the eye; the conclusion still states the one finding.</a:t>
+            </a:r>
+          </a:p>
+          <a:p>
             <a:endParaRPr lang="en-US" dirty="0"/>
+          </a:p>
+          <a:p>
+            <a:r>
+              <a:rPr lang="en-US" dirty="0"/>
+              <a:t>Design rules shown: the figure is drawn half width (5.9 x 4.6 in) and placed 1:1 on the left; at most three short gray bullets at 18 pt on the right; bars start at chance (0.5); accent = CI excludes 0.5.</a:t>
+            </a:r>
+          </a:p>
+          <a:p>
+            <a:endParaRPr lang="en-US" dirty="0"/>
+          </a:p>
+          <a:p>
+            <a:r>
+              <a:rPr lang="en-US" dirty="0"/>
+              <a:t>Numbers: auc_bars_example run_meta (n = 686, 497 ER-positive, 2,000 bootstrap resamples, random_state 0). Grade I–II [0.618–0.694], age [0.519–0.618], nodes [0.498–0.602], tumor size [0.458–0.554].</a:t>
+            </a:r>
+          </a:p>
+          <a:p>
+            <a:endParaRPr lang="en-US" dirty="0"/>
+          </a:p>
+          <a:p>
+            <a:r>
+              <a:rPr lang="en-US" dirty="0"/>
+              <a:t>Over-reading: the direction of the flipped predictors (grade, nodes, size) was read off the same data, so AUCs near 0.5 are descriptive only.</a:t>
+            </a:r>
           </a:p>
         </p:txBody>
       </p:sp>
@@ -1422,11 +1636,26 @@
           <a:p>
             <a:r>
               <a:rPr lang="en-US" dirty="0"/>
-              <a:t>PATTERN: callout / annotated figure. Use it when the audience must learn to read a figure type (first KM in a talk, an unfamiliar plot), or when one region carries the message.
-Design rules shown: the figure itself is unchanged and placed 1:1; the highlight is a thin accent rectangle and the callout a small native text box joined by a thin line, so both stay editable and can be removed; the callout sits in white space and covers no data.
-Numbers: at-risk counts drawn in km_example (follow-up &gt;= t): tamoxifen 246, 177, 104, 18; no tamoxifen 440, 281, 124, 18 at 0, 2, 4, 6 years.</a:t>
-            </a:r>
+              <a:t>PATTERN: callout / annotated figure. Use it when the audience must learn to read a figure type (first KM in a talk, an unfamiliar plot), or when one region carries the message.</a:t>
+            </a:r>
+          </a:p>
+          <a:p>
             <a:endParaRPr lang="en-US" dirty="0"/>
+          </a:p>
+          <a:p>
+            <a:r>
+              <a:rPr lang="en-US" dirty="0"/>
+              <a:t>Design rules shown: the figure itself is unchanged and placed 1:1; the highlight is a thin accent rectangle and the callout a small native text box joined by a thin line, so both stay editable and can be removed; the callout sits in white space and covers no data.</a:t>
+            </a:r>
+          </a:p>
+          <a:p>
+            <a:endParaRPr lang="en-US" dirty="0"/>
+          </a:p>
+          <a:p>
+            <a:r>
+              <a:rPr lang="en-US" dirty="0"/>
+              <a:t>Numbers: at-risk counts drawn in km_example (follow-up &gt;= t): tamoxifen 246, 177, 104, 18; no tamoxifen 440, 281, 124, 18 at 0, 2, 4, 6 years.</a:t>
+            </a:r>
           </a:p>
         </p:txBody>
       </p:sp>
@@ -1512,11 +1741,26 @@
           <a:p>
             <a:r>
               <a:rPr lang="en-US" dirty="0"/>
-              <a:t>PATTERN: progressive emphasis, step 1 of 2. Use two consecutive slides with the same figure in the same position instead of an animation: step 1 shows the whole picture, step 2 adds a highlight and a new conclusion. It survives PDF export and printed handouts, where animations are lost.
-Design rules shown: the figure does not move between the two slides (identical x, y, size), so flipping between them reads as a build; the highlight is a semi-transparent accent box over the q &lt; 0.05 rows only; the conclusion changes with the emphasis.
-Numbers: forest_example run_meta. q &lt; 0.05: tumour size, nodes, PR, ER, grade III, tamoxifen (largest q = 0.0048 for grade III and tamoxifen). Not significant: age (q 0.510), postmenopausal (q 0.596).</a:t>
-            </a:r>
+              <a:t>PATTERN: progressive emphasis, step 1 of 2. Use two consecutive slides with the same figure in the same position instead of an animation: step 1 shows the whole picture, step 2 adds a highlight and a new conclusion. It survives PDF export and printed handouts, where animations are lost.</a:t>
+            </a:r>
+          </a:p>
+          <a:p>
             <a:endParaRPr lang="en-US" dirty="0"/>
+          </a:p>
+          <a:p>
+            <a:r>
+              <a:rPr lang="en-US" dirty="0"/>
+              <a:t>Design rules shown: the figure does not move between the two slides (identical x, y, size), so flipping between them reads as a build; the highlight is a semi-transparent accent box over the q &lt; 0.05 rows only; the conclusion changes with the emphasis.</a:t>
+            </a:r>
+          </a:p>
+          <a:p>
+            <a:endParaRPr lang="en-US" dirty="0"/>
+          </a:p>
+          <a:p>
+            <a:r>
+              <a:rPr lang="en-US" dirty="0"/>
+              <a:t>Numbers: forest_example run_meta. q &lt; 0.05: tumor size, nodes, PR, ER, grade III, tamoxifen (largest q = 0.0048 for grade III and tamoxifen). Not significant: age (q 0.510), postmenopausal (q 0.596).</a:t>
+            </a:r>
           </a:p>
         </p:txBody>
       </p:sp>
@@ -1602,11 +1846,26 @@
           <a:p>
             <a:r>
               <a:rPr lang="en-US" dirty="0"/>
-              <a:t>PATTERN: progressive emphasis, step 2 of 2. Use two consecutive slides with the same figure in the same position instead of an animation: step 1 shows the whole picture, step 2 adds a highlight and a new conclusion. It survives PDF export and printed handouts, where animations are lost.
-Design rules shown: the figure does not move between the two slides (identical x, y, size), so flipping between them reads as a build; the highlight is a semi-transparent accent box over the q &lt; 0.05 rows only; the conclusion changes with the emphasis.
-Numbers: forest_example run_meta. q &lt; 0.05: tumour size, nodes, PR, ER, grade III, tamoxifen (largest q = 0.0048 for grade III and tamoxifen). Not significant: age (q 0.510), postmenopausal (q 0.596).</a:t>
-            </a:r>
+              <a:t>PATTERN: progressive emphasis, step 2 of 2. Use two consecutive slides with the same figure in the same position instead of an animation: step 1 shows the whole picture, step 2 adds a highlight and a new conclusion. It survives PDF export and printed handouts, where animations are lost.</a:t>
+            </a:r>
+          </a:p>
+          <a:p>
             <a:endParaRPr lang="en-US" dirty="0"/>
+          </a:p>
+          <a:p>
+            <a:r>
+              <a:rPr lang="en-US" dirty="0"/>
+              <a:t>Design rules shown: the figure does not move between the two slides (identical x, y, size), so flipping between them reads as a build; the highlight is a semi-transparent accent box over the q &lt; 0.05 rows only; the conclusion changes with the emphasis.</a:t>
+            </a:r>
+          </a:p>
+          <a:p>
+            <a:endParaRPr lang="en-US" dirty="0"/>
+          </a:p>
+          <a:p>
+            <a:r>
+              <a:rPr lang="en-US" dirty="0"/>
+              <a:t>Numbers: forest_example run_meta. q &lt; 0.05: tumor size, nodes, PR, ER, grade III, tamoxifen (largest q = 0.0048 for grade III and tamoxifen). Not significant: age (q 0.510), postmenopausal (q 0.596).</a:t>
+            </a:r>
           </a:p>
         </p:txBody>
       </p:sp>
@@ -3233,7 +3492,7 @@
                           <a:ea typeface="Arial" pitchFamily="34" charset="-122"/>
                           <a:cs typeface="Arial" pitchFamily="34" charset="-120"/>
                         </a:rPr>
-                        <a:t>Tumour size</a:t>
+                        <a:t>Tumor size</a:t>
                       </a:r>
                       <a:endParaRPr lang="en-US" sz="1200" dirty="0">
                         <a:latin typeface="Arial" charset="0"/>
@@ -5559,7 +5818,7 @@
                 <a:ea typeface="Arial" pitchFamily="34" charset="-122"/>
                 <a:cs typeface="Arial" pitchFamily="34" charset="-120"/>
               </a:rPr>
-              <a:t>All clinical = nodes, tumour size, grade III, age, postmenopausal, PR, ER and tamoxifen. Apparent C-index: fitted and evaluated on the same 686 patients.</a:t>
+              <a:t>All clinical = nodes, tumor size, grade III, age, postmenopausal, PR, ER and tamoxifen. Apparent C-index: fitted and evaluated on the same 686 patients.</a:t>
             </a:r>
             <a:endParaRPr lang="en-US" sz="1400" dirty="0"/>
           </a:p>
@@ -5777,7 +6036,7 @@
                 <a:ea typeface="Arial" pitchFamily="34" charset="-122"/>
                 <a:cs typeface="Arial" pitchFamily="34" charset="-120"/>
               </a:rPr>
-              <a:t>oestrogen receptor.</a:t>
+              <a:t>estrogen receptor.</a:t>
             </a:r>
             <a:endParaRPr lang="en-US" sz="950" dirty="0"/>
           </a:p>
@@ -6733,7 +6992,7 @@
                 <a:ea typeface="Arial" pitchFamily="34" charset="-122"/>
                 <a:cs typeface="Arial" pitchFamily="34" charset="-120"/>
               </a:rPr>
-              <a:t>Adjusted for positive nodes, tumour size, grade III, age, postmenopausal status, PR and ER (continuous per SD).</a:t>
+              <a:t>Adjusted for positive nodes, tumor size, grade III, age, postmenopausal status, PR and ER (continuous per SD).</a:t>
             </a:r>
             <a:endParaRPr lang="en-US" sz="1400" dirty="0"/>
           </a:p>
@@ -6951,7 +7210,7 @@
                 <a:ea typeface="Arial" pitchFamily="34" charset="-122"/>
                 <a:cs typeface="Arial" pitchFamily="34" charset="-120"/>
               </a:rPr>
-              <a:t>oestrogen receptor.</a:t>
+              <a:t>estrogen receptor.</a:t>
             </a:r>
             <a:endParaRPr lang="en-US" sz="950" dirty="0"/>
           </a:p>
@@ -7836,7 +8095,7 @@
                           <a:ea typeface="Arial" pitchFamily="34" charset="-122"/>
                           <a:cs typeface="Arial" pitchFamily="34" charset="-120"/>
                         </a:rPr>
-                        <a:t>Tumour size (per SD)</a:t>
+                        <a:t>Tumor size (per SD)</a:t>
                       </a:r>
                       <a:endParaRPr lang="en-US" sz="1200" dirty="0">
                         <a:latin typeface="Arial" charset="0"/>
@@ -9627,7 +9886,7 @@
                 <a:ea typeface="Arial" pitchFamily="34" charset="-122"/>
                 <a:cs typeface="Arial" pitchFamily="34" charset="-120"/>
               </a:rPr>
-              <a:t>Nodes, PR receptor and tamoxifen stay associated in the multivariable model (HR 1.58, 0.67, 0.68; all p ≤ 0.003); tumour size, grade III and ER do not (n = 686, 299 events).</a:t>
+              <a:t>Nodes, PR receptor and tamoxifen stay associated in the multivariable model (HR 1.58, 0.67, 0.68; all p ≤ 0.003); tumor size, grade III and ER do not (n = 686, 299 events).</a:t>
             </a:r>
             <a:endParaRPr lang="en-US" sz="1800" dirty="0"/>
           </a:p>
@@ -9848,7 +10107,7 @@
                 <a:ea typeface="Arial" pitchFamily="34" charset="-122"/>
                 <a:cs typeface="Arial" pitchFamily="34" charset="-120"/>
               </a:rPr>
-              <a:t>oestrogen receptor;</a:t>
+              <a:t>estrogen receptor;</a:t>
             </a:r>
             <a:pPr algn="l" indent="0" marL="0">
               <a:buNone/>
@@ -10359,7 +10618,7 @@
                 <a:ea typeface="Arial" pitchFamily="34" charset="-122"/>
                 <a:cs typeface="Arial" pitchFamily="34" charset="-120"/>
               </a:rPr>
-              <a:t>oestrogen receptor.</a:t>
+              <a:t>estrogen receptor.</a:t>
             </a:r>
             <a:endParaRPr lang="en-US" sz="950" dirty="0"/>
           </a:p>
@@ -10870,7 +11129,7 @@
                 <a:ea typeface="Arial" pitchFamily="34" charset="-122"/>
                 <a:cs typeface="Arial" pitchFamily="34" charset="-120"/>
               </a:rPr>
-              <a:t>oestrogen receptor;</a:t>
+              <a:t>estrogen receptor;</a:t>
             </a:r>
             <a:pPr algn="l" indent="0" marL="0">
               <a:buNone/>
@@ -11824,7 +12083,7 @@
                           <a:ea typeface="Arial" pitchFamily="34" charset="-122"/>
                           <a:cs typeface="Arial" pitchFamily="34" charset="-120"/>
                         </a:rPr>
-                        <a:t>Tumour size, mm, median (IQR)</a:t>
+                        <a:t>Tumor size, mm, median (IQR)</a:t>
                       </a:r>
                       <a:endParaRPr lang="en-US" sz="1200" dirty="0">
                         <a:latin typeface="Arial" charset="0"/>
@@ -12531,7 +12790,7 @@
                 <a:ea typeface="Arial" pitchFamily="34" charset="-122"/>
                 <a:cs typeface="Arial" pitchFamily="34" charset="-120"/>
               </a:rPr>
-              <a:t>Women given tamoxifen were older (median 58 vs 50 years) and more often postmenopausal (76% vs 48%); tumour size, grade and nodes were similar (n = 686).</a:t>
+              <a:t>Women given tamoxifen were older (median 58 vs 50 years) and more often postmenopausal (76% vs 48%); tumor size, grade and nodes were similar (n = 686).</a:t>
             </a:r>
             <a:endParaRPr lang="en-US" sz="1800" dirty="0"/>
           </a:p>
@@ -13671,7 +13930,7 @@
                 <a:ea typeface="Arial" pitchFamily="34" charset="-122"/>
                 <a:cs typeface="Arial" pitchFamily="34" charset="-120"/>
               </a:rPr>
-              <a:t>Nodes and tumour size: CIs include 0.5</a:t>
+              <a:t>Nodes and tumor size: CIs include 0.5</a:t>
             </a:r>
             <a:endParaRPr lang="en-US" sz="1800" dirty="0"/>
           </a:p>
@@ -13847,7 +14106,7 @@
                 <a:ea typeface="Arial" pitchFamily="34" charset="-122"/>
                 <a:cs typeface="Arial" pitchFamily="34" charset="-120"/>
               </a:rPr>
-              <a:t>oestrogen receptor;</a:t>
+              <a:t>estrogen receptor;</a:t>
             </a:r>
             <a:pPr algn="l" indent="0" marL="0">
               <a:buNone/>
@@ -14956,7 +15215,7 @@
                 <a:ea typeface="Arial" pitchFamily="34" charset="-122"/>
                 <a:cs typeface="Arial" pitchFamily="34" charset="-120"/>
               </a:rPr>
-              <a:t>oestrogen receptor;</a:t>
+              <a:t>estrogen receptor;</a:t>
             </a:r>
             <a:pPr algn="l" indent="0" marL="0">
               <a:buNone/>
@@ -15342,7 +15601,7 @@
                 <a:ea typeface="Arial" pitchFamily="34" charset="-122"/>
                 <a:cs typeface="Arial" pitchFamily="34" charset="-120"/>
               </a:rPr>
-              <a:t>Six of eight factors have q &lt; 0.05 (all q ≤ 0.005): larger tumours, more nodes and grade III with shorter, higher receptor levels and tamoxifen with longer recurrence-free survival.</a:t>
+              <a:t>Six of eight factors have q &lt; 0.05 (all q ≤ 0.005): larger tumors, more nodes and grade III with shorter, higher receptor levels and tamoxifen with longer recurrence-free survival.</a:t>
             </a:r>
             <a:endParaRPr lang="en-US" sz="1800" dirty="0"/>
           </a:p>
@@ -15563,7 +15822,7 @@
                 <a:ea typeface="Arial" pitchFamily="34" charset="-122"/>
                 <a:cs typeface="Arial" pitchFamily="34" charset="-120"/>
               </a:rPr>
-              <a:t>oestrogen receptor;</a:t>
+              <a:t>estrogen receptor;</a:t>
             </a:r>
             <a:pPr algn="l" indent="0" marL="0">
               <a:buNone/>
